--- a/sip-repo/docs/GroupNN-Sip.pptx
+++ b/sip-repo/docs/GroupNN-Sip.pptx
@@ -14,9 +14,12 @@
     <p:sldId id="262" r:id="rId8"/>
     <p:sldId id="263" r:id="rId9"/>
     <p:sldId id="264" r:id="rId10"/>
+    <p:sldId id="265" r:id="rId11"/>
+    <p:sldId id="266" r:id="rId12"/>
+    <p:sldId id="267" r:id="rId13"/>
   </p:sldIdLst>
   <p:notesMasterIdLst>
-    <p:notesMasterId r:id="rId11"/>
+    <p:notesMasterId r:id="rId14"/>
   </p:notesMasterIdLst>
   <p:sldSz cx="12192000" cy="6858000"/>
   <p:notesSz cx="6858000" cy="12192000"/>
@@ -115,29 +118,32 @@
   <p:extLst>
     <p:ext uri="{521415D9-36F7-43E2-AB2F-B90AF26B5E84}">
       <p14:sectionLst xmlns:p14="http://schemas.microsoft.com/office/powerpoint/2010/main">
-        <p14:section name="Overview" id="{29a3bd0e-536a-a597-339a-1731384785c7}">
+        <p14:section name="Overview" id="{3c63b12e-8960-bd38-856c-25b92b6e2344}">
           <p14:sldIdLst>
             <p14:sldId id="256"/>
             <p14:sldId id="257"/>
           </p14:sldIdLst>
         </p14:section>
-        <p14:section name="Architecture" id="{12b3ed6f-6340-47e2-6805-0a9cd77ec2d0}">
+        <p14:section name="Architecture" id="{ef7c3a2f-74e9-7734-5d65-33f5a92f122f}">
           <p14:sldIdLst>
             <p14:sldId id="258"/>
             <p14:sldId id="259"/>
             <p14:sldId id="260"/>
           </p14:sldIdLst>
         </p14:section>
-        <p14:section name="Progress" id="{84e54b46-5af7-4d4d-b4a9-0c766d047fc4}">
+        <p14:section name="Progress" id="{428fe1ce-3a81-843c-1dd8-e4b631a9c789}">
           <p14:sldIdLst>
             <p14:sldId id="261"/>
             <p14:sldId id="262"/>
             <p14:sldId id="263"/>
+            <p14:sldId id="264"/>
+            <p14:sldId id="265"/>
+            <p14:sldId id="266"/>
           </p14:sldIdLst>
         </p14:section>
-        <p14:section name="Next steps" id="{c1304cee-8e38-1584-6997-dc65fbdea270}">
+        <p14:section name="Next steps" id="{70a8d4c7-a49b-fc3b-9624-c10de9f64ca6}">
           <p14:sldIdLst>
-            <p14:sldId id="264"/>
+            <p14:sldId id="267"/>
           </p14:sldIdLst>
         </p14:section>
       </p14:sectionLst>
@@ -586,6 +592,270 @@
 </p:notes>
 </file>
 
+<file path=ppt/notesSlides/notesSlide10.xml><?xml version="1.0" encoding="utf-8"?>
+<p:notes xmlns:a="http://schemas.openxmlformats.org/drawingml/2006/main" xmlns:r="http://schemas.openxmlformats.org/officeDocument/2006/relationships" xmlns:p="http://schemas.openxmlformats.org/presentationml/2006/main">
+  <p:cSld>
+    <p:spTree>
+      <p:nvGrpSpPr>
+        <p:cNvPr id="1" name=""/>
+        <p:cNvGrpSpPr/>
+        <p:nvPr/>
+      </p:nvGrpSpPr>
+      <p:grpSpPr>
+        <a:xfrm>
+          <a:off x="0" y="0"/>
+          <a:ext cx="0" cy="0"/>
+          <a:chOff x="0" y="0"/>
+          <a:chExt cx="0" cy="0"/>
+        </a:xfrm>
+      </p:grpSpPr>
+      <p:sp>
+        <p:nvSpPr>
+          <p:cNvPr id="2" name="Slide Image Placeholder 1"/>
+          <p:cNvSpPr>
+            <a:spLocks noGrp="1" noRot="1" noChangeAspect="1"/>
+          </p:cNvSpPr>
+          <p:nvPr>
+            <p:ph type="sldImg"/>
+          </p:nvPr>
+        </p:nvSpPr>
+        <p:spPr/>
+      </p:sp>
+      <p:sp>
+        <p:nvSpPr>
+          <p:cNvPr id="3" name="Notes Placeholder 2"/>
+          <p:cNvSpPr>
+            <a:spLocks noGrp="1"/>
+          </p:cNvSpPr>
+          <p:nvPr>
+            <p:ph type="body" idx="1"/>
+          </p:nvPr>
+        </p:nvSpPr>
+        <p:spPr/>
+        <p:txBody>
+          <a:bodyPr/>
+          <a:lstStyle/>
+          <a:p>
+            <a:r>
+              <a:rPr lang="en-US" dirty="0"/>
+              <a:t>Thirty seconds. Ranks deliberately exclude replies — ranking on comments turns a review app into a comment farm. The empty state is our answer to cold start.</a:t>
+            </a:r>
+            <a:endParaRPr lang="en-US" dirty="0"/>
+          </a:p>
+        </p:txBody>
+      </p:sp>
+      <p:sp>
+        <p:nvSpPr>
+          <p:cNvPr id="4" name="Slide Number Placeholder 3"/>
+          <p:cNvSpPr>
+            <a:spLocks noGrp="1"/>
+          </p:cNvSpPr>
+          <p:nvPr>
+            <p:ph type="sldNum" sz="quarter" idx="10"/>
+          </p:nvPr>
+        </p:nvSpPr>
+        <p:spPr/>
+        <p:txBody>
+          <a:bodyPr/>
+          <a:lstStyle/>
+          <a:p>
+            <a:fld id="{F7021451-1387-4CA6-816F-3879F97B5CBC}" type="slidenum">
+              <a:rPr lang="en-US"/>
+              <a:t>10</a:t>
+            </a:fld>
+            <a:endParaRPr lang="en-US"/>
+          </a:p>
+        </p:txBody>
+      </p:sp>
+    </p:spTree>
+    <p:extLst>
+      <p:ext uri="{BB962C8B-B14F-4D97-AF65-F5344CB8AC3E}">
+        <p14:creationId xmlns:p14="http://schemas.microsoft.com/office/powerpoint/2010/main" val="1024086991"/>
+      </p:ext>
+    </p:extLst>
+  </p:cSld>
+  <p:clrMapOvr>
+    <a:masterClrMapping/>
+  </p:clrMapOvr>
+</p:notes>
+</file>
+
+<file path=ppt/notesSlides/notesSlide11.xml><?xml version="1.0" encoding="utf-8"?>
+<p:notes xmlns:a="http://schemas.openxmlformats.org/drawingml/2006/main" xmlns:r="http://schemas.openxmlformats.org/officeDocument/2006/relationships" xmlns:p="http://schemas.openxmlformats.org/presentationml/2006/main">
+  <p:cSld>
+    <p:spTree>
+      <p:nvGrpSpPr>
+        <p:cNvPr id="1" name=""/>
+        <p:cNvGrpSpPr/>
+        <p:nvPr/>
+      </p:nvGrpSpPr>
+      <p:grpSpPr>
+        <a:xfrm>
+          <a:off x="0" y="0"/>
+          <a:ext cx="0" cy="0"/>
+          <a:chOff x="0" y="0"/>
+          <a:chExt cx="0" cy="0"/>
+        </a:xfrm>
+      </p:grpSpPr>
+      <p:sp>
+        <p:nvSpPr>
+          <p:cNvPr id="2" name="Slide Image Placeholder 1"/>
+          <p:cNvSpPr>
+            <a:spLocks noGrp="1" noRot="1" noChangeAspect="1"/>
+          </p:cNvSpPr>
+          <p:nvPr>
+            <p:ph type="sldImg"/>
+          </p:nvPr>
+        </p:nvSpPr>
+        <p:spPr/>
+      </p:sp>
+      <p:sp>
+        <p:nvSpPr>
+          <p:cNvPr id="3" name="Notes Placeholder 2"/>
+          <p:cNvSpPr>
+            <a:spLocks noGrp="1"/>
+          </p:cNvSpPr>
+          <p:nvPr>
+            <p:ph type="body" idx="1"/>
+          </p:nvPr>
+        </p:nvSpPr>
+        <p:spPr/>
+        <p:txBody>
+          <a:bodyPr/>
+          <a:lstStyle/>
+          <a:p>
+            <a:r>
+              <a:rPr lang="en-US" dirty="0"/>
+              <a:t>Forty-five seconds. The NAT story and the circular dependency are the two worth telling — one is a cost decision, the other shows you understand how CloudFormation orders resources.</a:t>
+            </a:r>
+            <a:endParaRPr lang="en-US" dirty="0"/>
+          </a:p>
+        </p:txBody>
+      </p:sp>
+      <p:sp>
+        <p:nvSpPr>
+          <p:cNvPr id="4" name="Slide Number Placeholder 3"/>
+          <p:cNvSpPr>
+            <a:spLocks noGrp="1"/>
+          </p:cNvSpPr>
+          <p:nvPr>
+            <p:ph type="sldNum" sz="quarter" idx="10"/>
+          </p:nvPr>
+        </p:nvSpPr>
+        <p:spPr/>
+        <p:txBody>
+          <a:bodyPr/>
+          <a:lstStyle/>
+          <a:p>
+            <a:fld id="{F7021451-1387-4CA6-816F-3879F97B5CBC}" type="slidenum">
+              <a:rPr lang="en-US"/>
+              <a:t>11</a:t>
+            </a:fld>
+            <a:endParaRPr lang="en-US"/>
+          </a:p>
+        </p:txBody>
+      </p:sp>
+    </p:spTree>
+    <p:extLst>
+      <p:ext uri="{BB962C8B-B14F-4D97-AF65-F5344CB8AC3E}">
+        <p14:creationId xmlns:p14="http://schemas.microsoft.com/office/powerpoint/2010/main" val="1024086991"/>
+      </p:ext>
+    </p:extLst>
+  </p:cSld>
+  <p:clrMapOvr>
+    <a:masterClrMapping/>
+  </p:clrMapOvr>
+</p:notes>
+</file>
+
+<file path=ppt/notesSlides/notesSlide12.xml><?xml version="1.0" encoding="utf-8"?>
+<p:notes xmlns:a="http://schemas.openxmlformats.org/drawingml/2006/main" xmlns:r="http://schemas.openxmlformats.org/officeDocument/2006/relationships" xmlns:p="http://schemas.openxmlformats.org/presentationml/2006/main">
+  <p:cSld>
+    <p:spTree>
+      <p:nvGrpSpPr>
+        <p:cNvPr id="1" name=""/>
+        <p:cNvGrpSpPr/>
+        <p:nvPr/>
+      </p:nvGrpSpPr>
+      <p:grpSpPr>
+        <a:xfrm>
+          <a:off x="0" y="0"/>
+          <a:ext cx="0" cy="0"/>
+          <a:chOff x="0" y="0"/>
+          <a:chExt cx="0" cy="0"/>
+        </a:xfrm>
+      </p:grpSpPr>
+      <p:sp>
+        <p:nvSpPr>
+          <p:cNvPr id="2" name="Slide Image Placeholder 1"/>
+          <p:cNvSpPr>
+            <a:spLocks noGrp="1" noRot="1" noChangeAspect="1"/>
+          </p:cNvSpPr>
+          <p:nvPr>
+            <p:ph type="sldImg"/>
+          </p:nvPr>
+        </p:nvSpPr>
+        <p:spPr/>
+      </p:sp>
+      <p:sp>
+        <p:nvSpPr>
+          <p:cNvPr id="3" name="Notes Placeholder 2"/>
+          <p:cNvSpPr>
+            <a:spLocks noGrp="1"/>
+          </p:cNvSpPr>
+          <p:nvPr>
+            <p:ph type="body" idx="1"/>
+          </p:nvPr>
+        </p:nvSpPr>
+        <p:spPr/>
+        <p:txBody>
+          <a:bodyPr/>
+          <a:lstStyle/>
+          <a:p>
+            <a:r>
+              <a:rPr lang="en-US" dirty="0"/>
+              <a:t>Forty-five seconds. Naming the menu-entry problem before anyone asks reads as planning, not as a gap.</a:t>
+            </a:r>
+            <a:endParaRPr lang="en-US" dirty="0"/>
+          </a:p>
+        </p:txBody>
+      </p:sp>
+      <p:sp>
+        <p:nvSpPr>
+          <p:cNvPr id="4" name="Slide Number Placeholder 3"/>
+          <p:cNvSpPr>
+            <a:spLocks noGrp="1"/>
+          </p:cNvSpPr>
+          <p:nvPr>
+            <p:ph type="sldNum" sz="quarter" idx="10"/>
+          </p:nvPr>
+        </p:nvSpPr>
+        <p:spPr/>
+        <p:txBody>
+          <a:bodyPr/>
+          <a:lstStyle/>
+          <a:p>
+            <a:fld id="{F7021451-1387-4CA6-816F-3879F97B5CBC}" type="slidenum">
+              <a:rPr lang="en-US"/>
+              <a:t>12</a:t>
+            </a:fld>
+            <a:endParaRPr lang="en-US"/>
+          </a:p>
+        </p:txBody>
+      </p:sp>
+    </p:spTree>
+    <p:extLst>
+      <p:ext uri="{BB962C8B-B14F-4D97-AF65-F5344CB8AC3E}">
+        <p14:creationId xmlns:p14="http://schemas.microsoft.com/office/powerpoint/2010/main" val="1024086991"/>
+      </p:ext>
+    </p:extLst>
+  </p:cSld>
+  <p:clrMapOvr>
+    <a:masterClrMapping/>
+  </p:clrMapOvr>
+</p:notes>
+</file>
+
 <file path=ppt/notesSlides/notesSlide2.xml><?xml version="1.0" encoding="utf-8"?>
 <p:notes xmlns:a="http://schemas.openxmlformats.org/drawingml/2006/main" xmlns:r="http://schemas.openxmlformats.org/officeDocument/2006/relationships" xmlns:p="http://schemas.openxmlformats.org/presentationml/2006/main">
   <p:cSld>
@@ -1072,7 +1342,7 @@
           <a:p>
             <a:r>
               <a:rPr lang="en-US" dirty="0"/>
-              <a:t>Thirty seconds. Say plainly that this is design, not running code, then move on — the demo is where progress gets proven.</a:t>
+              <a:t>Thirty seconds. Say plainly this is design, not running code. The Post tab is the one worth pausing on: requiring a review before you can speak is the moderation strategy.</a:t>
             </a:r>
             <a:endParaRPr lang="en-US" dirty="0"/>
           </a:p>
@@ -1160,7 +1430,7 @@
           <a:p>
             <a:r>
               <a:rPr lang="en-US" dirty="0"/>
-              <a:t>Forty-five seconds. The NAT story and the circular dependency are the two worth telling — one is a cost decision, the other shows you understand how CloudFormation orders resources.</a:t>
+              <a:t>Forty-five seconds. Compare is the whole product — lead with it. Location detail is where Google Places integration lands, and the menu there carries ratings their real menu never will.</a:t>
             </a:r>
             <a:endParaRPr lang="en-US" dirty="0"/>
           </a:p>
@@ -1248,7 +1518,7 @@
           <a:p>
             <a:r>
               <a:rPr lang="en-US" dirty="0"/>
-              <a:t>Forty-five seconds. Naming the menu-entry problem before anyone asks reads as planning, not as a gap.</a:t>
+              <a:t>Forty-five seconds. The modified toggle protects the integrity of the aggregate. Review again is the partial unique index made visible — and that constraint is already working in the deployed API.</a:t>
             </a:r>
             <a:endParaRPr lang="en-US" dirty="0"/>
           </a:p>
@@ -2204,6 +2474,876 @@
               <a:t>Oscar Barrios Jimenez (oxb3281)  ·  Evan Willsey (exw1419)</a:t>
             </a:r>
             <a:endParaRPr lang="en-US" sz="1600" dirty="0"/>
+          </a:p>
+        </p:txBody>
+      </p:sp>
+    </p:spTree>
+  </p:cSld>
+  <p:clrMapOvr>
+    <a:masterClrMapping/>
+  </p:clrMapOvr>
+</p:sld>
+</file>
+
+<file path=ppt/slides/slide10.xml><?xml version="1.0" encoding="utf-8"?>
+<p:sld xmlns:a="http://schemas.openxmlformats.org/drawingml/2006/main" xmlns:r="http://schemas.openxmlformats.org/officeDocument/2006/relationships" xmlns:p="http://schemas.openxmlformats.org/presentationml/2006/main">
+  <p:cSld name="Slide 10">
+    <p:spTree>
+      <p:nvGrpSpPr>
+        <p:cNvPr id="1" name=""/>
+        <p:cNvGrpSpPr/>
+        <p:nvPr/>
+      </p:nvGrpSpPr>
+      <p:grpSpPr>
+        <a:xfrm>
+          <a:off x="0" y="0"/>
+          <a:ext cx="0" cy="0"/>
+          <a:chOff x="0" y="0"/>
+          <a:chExt cx="0" cy="0"/>
+        </a:xfrm>
+      </p:grpSpPr>
+      <p:sp>
+        <p:nvSpPr>
+          <p:cNvPr id="2" name="Text 1"/>
+          <p:cNvSpPr/>
+          <p:nvPr>
+            <p:ph idx="101" type="title" hasCustomPrompt="1"/>
+          </p:nvPr>
+        </p:nvSpPr>
+        <p:spPr>
+          <a:xfrm>
+            <a:off x="731520" y="411480"/>
+            <a:ext cx="10698480" cy="594360"/>
+          </a:xfrm>
+          <a:prstGeom prst="rect">
+            <a:avLst/>
+          </a:prstGeom>
+          <a:noFill/>
+          <a:ln/>
+        </p:spPr>
+        <p:txBody>
+          <a:bodyPr wrap="square" rtlCol="0" anchor="ctr"/>
+          <a:lstStyle/>
+          <a:p>
+            <a:pPr algn="l" indent="0" marL="0">
+              <a:buNone/>
+            </a:pPr>
+            <a:r>
+              <a:rPr lang="en-US" sz="3000" b="1" dirty="0">
+                <a:solidFill>
+                  <a:schemeClr val="tx1"/>
+                </a:solidFill>
+              </a:rPr>
+              <a:t>The app: coming back</a:t>
+            </a:r>
+            <a:endParaRPr lang="en-US" sz="3000" dirty="0"/>
+          </a:p>
+        </p:txBody>
+      </p:sp>
+      <p:pic>
+        <p:nvPicPr>
+          <p:cNvPr id="3" name="Profile" descr="/home/claude/restored/sip-repo/docs/screens/screen-13.png">    </p:cNvPr>
+          <p:cNvPicPr>
+            <a:picLocks noChangeAspect="1"/>
+          </p:cNvPicPr>
+          <p:nvPr/>
+        </p:nvPicPr>
+        <p:blipFill>
+          <a:blip r:embed="rId1"/>
+          <a:stretch>
+            <a:fillRect/>
+          </a:stretch>
+        </p:blipFill>
+        <p:spPr>
+          <a:xfrm>
+            <a:off x="1045070" y="1371600"/>
+            <a:ext cx="1903501" cy="3931920"/>
+          </a:xfrm>
+          <a:prstGeom prst="rect">
+            <a:avLst/>
+          </a:prstGeom>
+        </p:spPr>
+      </p:pic>
+      <p:sp>
+        <p:nvSpPr>
+          <p:cNvPr id="4" name="Text 1"/>
+          <p:cNvSpPr txBox="1"/>
+          <p:nvPr/>
+        </p:nvSpPr>
+        <p:spPr>
+          <a:xfrm>
+            <a:off x="731520" y="5413248"/>
+            <a:ext cx="2530602" cy="914400"/>
+          </a:xfrm>
+          <a:prstGeom prst="rect">
+            <a:avLst/>
+          </a:prstGeom>
+          <a:noFill/>
+          <a:ln/>
+        </p:spPr>
+        <p:txBody>
+          <a:bodyPr wrap="square" lIns="0" tIns="0" rIns="0" bIns="0" rtlCol="0" anchor="t"/>
+          <a:lstStyle/>
+          <a:p>
+            <a:pPr algn="ctr" indent="0" marL="0">
+              <a:buNone/>
+            </a:pPr>
+            <a:r>
+              <a:rPr lang="en-US" sz="1250" b="1" dirty="0">
+                <a:solidFill>
+                  <a:srgbClr val="1F1D1A"/>
+                </a:solidFill>
+              </a:rPr>
+              <a:t>Profile</a:t>
+            </a:r>
+            <a:endParaRPr lang="en-US" sz="1250" dirty="0"/>
+          </a:p>
+          <a:p>
+            <a:pPr algn="ctr" indent="0" marL="0">
+              <a:buNone/>
+            </a:pPr>
+            <a:r>
+              <a:rPr lang="en-US" sz="1050" dirty="0">
+                <a:solidFill>
+                  <a:srgbClr val="4A4438"/>
+                </a:solidFill>
+              </a:rPr>
+              <a:t>Rank, three stats, then a grid with each score burned into the tile.</a:t>
+            </a:r>
+            <a:endParaRPr lang="en-US" sz="1250" dirty="0"/>
+          </a:p>
+        </p:txBody>
+      </p:sp>
+      <p:pic>
+        <p:nvPicPr>
+          <p:cNvPr id="5" name="Ranks" descr="/home/claude/restored/sip-repo/docs/screens/screen-14.png">    </p:cNvPr>
+          <p:cNvPicPr>
+            <a:picLocks noChangeAspect="1"/>
+          </p:cNvPicPr>
+          <p:nvPr/>
+        </p:nvPicPr>
+        <p:blipFill>
+          <a:blip r:embed="rId2"/>
+          <a:stretch>
+            <a:fillRect/>
+          </a:stretch>
+        </p:blipFill>
+        <p:spPr>
+          <a:xfrm>
+            <a:off x="3776840" y="1371600"/>
+            <a:ext cx="1903501" cy="3931920"/>
+          </a:xfrm>
+          <a:prstGeom prst="rect">
+            <a:avLst/>
+          </a:prstGeom>
+        </p:spPr>
+      </p:pic>
+      <p:sp>
+        <p:nvSpPr>
+          <p:cNvPr id="6" name="Text 2"/>
+          <p:cNvSpPr txBox="1"/>
+          <p:nvPr/>
+        </p:nvSpPr>
+        <p:spPr>
+          <a:xfrm>
+            <a:off x="3463290" y="5413248"/>
+            <a:ext cx="2530602" cy="914400"/>
+          </a:xfrm>
+          <a:prstGeom prst="rect">
+            <a:avLst/>
+          </a:prstGeom>
+          <a:noFill/>
+          <a:ln/>
+        </p:spPr>
+        <p:txBody>
+          <a:bodyPr wrap="square" lIns="0" tIns="0" rIns="0" bIns="0" rtlCol="0" anchor="t"/>
+          <a:lstStyle/>
+          <a:p>
+            <a:pPr algn="ctr" indent="0" marL="0">
+              <a:buNone/>
+            </a:pPr>
+            <a:r>
+              <a:rPr lang="en-US" sz="1250" b="1" dirty="0">
+                <a:solidFill>
+                  <a:srgbClr val="1F1D1A"/>
+                </a:solidFill>
+              </a:rPr>
+              <a:t>Ranks</a:t>
+            </a:r>
+            <a:endParaRPr lang="en-US" sz="1250" dirty="0"/>
+          </a:p>
+          <a:p>
+            <a:pPr algn="ctr" indent="0" marL="0">
+              <a:buNone/>
+            </a:pPr>
+            <a:r>
+              <a:rPr lang="en-US" sz="1050" dirty="0">
+                <a:solidFill>
+                  <a:srgbClr val="4A4438"/>
+                </a:solidFill>
+              </a:rPr>
+              <a:t>Six tiers, earned by reviews with a photo and a note. Replies do not count.</a:t>
+            </a:r>
+            <a:endParaRPr lang="en-US" sz="1250" dirty="0"/>
+          </a:p>
+        </p:txBody>
+      </p:sp>
+      <p:pic>
+        <p:nvPicPr>
+          <p:cNvPr id="7" name="Saved" descr="/home/claude/restored/sip-repo/docs/screens/screen-10.png">    </p:cNvPr>
+          <p:cNvPicPr>
+            <a:picLocks noChangeAspect="1"/>
+          </p:cNvPicPr>
+          <p:nvPr/>
+        </p:nvPicPr>
+        <p:blipFill>
+          <a:blip r:embed="rId3"/>
+          <a:stretch>
+            <a:fillRect/>
+          </a:stretch>
+        </p:blipFill>
+        <p:spPr>
+          <a:xfrm>
+            <a:off x="6508610" y="1371600"/>
+            <a:ext cx="1903501" cy="3931920"/>
+          </a:xfrm>
+          <a:prstGeom prst="rect">
+            <a:avLst/>
+          </a:prstGeom>
+        </p:spPr>
+      </p:pic>
+      <p:sp>
+        <p:nvSpPr>
+          <p:cNvPr id="8" name="Text 3"/>
+          <p:cNvSpPr txBox="1"/>
+          <p:nvPr/>
+        </p:nvSpPr>
+        <p:spPr>
+          <a:xfrm>
+            <a:off x="6195060" y="5413248"/>
+            <a:ext cx="2530602" cy="914400"/>
+          </a:xfrm>
+          <a:prstGeom prst="rect">
+            <a:avLst/>
+          </a:prstGeom>
+          <a:noFill/>
+          <a:ln/>
+        </p:spPr>
+        <p:txBody>
+          <a:bodyPr wrap="square" lIns="0" tIns="0" rIns="0" bIns="0" rtlCol="0" anchor="t"/>
+          <a:lstStyle/>
+          <a:p>
+            <a:pPr algn="ctr" indent="0" marL="0">
+              <a:buNone/>
+            </a:pPr>
+            <a:r>
+              <a:rPr lang="en-US" sz="1250" b="1" dirty="0">
+                <a:solidFill>
+                  <a:srgbClr val="1F1D1A"/>
+                </a:solidFill>
+              </a:rPr>
+              <a:t>Saved</a:t>
+            </a:r>
+            <a:endParaRPr lang="en-US" sz="1250" dirty="0"/>
+          </a:p>
+          <a:p>
+            <a:pPr algn="ctr" indent="0" marL="0">
+              <a:buNone/>
+            </a:pPr>
+            <a:r>
+              <a:rPr lang="en-US" sz="1050" dirty="0">
+                <a:solidFill>
+                  <a:srgbClr val="4A4438"/>
+                </a:solidFill>
+              </a:rPr>
+              <a:t>Drinks to try, with open-now status so the list is actionable.</a:t>
+            </a:r>
+            <a:endParaRPr lang="en-US" sz="1250" dirty="0"/>
+          </a:p>
+        </p:txBody>
+      </p:sp>
+      <p:pic>
+        <p:nvPicPr>
+          <p:cNvPr id="9" name="Empty state" descr="/home/claude/restored/sip-repo/docs/screens/screen-12.png">    </p:cNvPr>
+          <p:cNvPicPr>
+            <a:picLocks noChangeAspect="1"/>
+          </p:cNvPicPr>
+          <p:nvPr/>
+        </p:nvPicPr>
+        <p:blipFill>
+          <a:blip r:embed="rId4"/>
+          <a:stretch>
+            <a:fillRect/>
+          </a:stretch>
+        </p:blipFill>
+        <p:spPr>
+          <a:xfrm>
+            <a:off x="9240380" y="1371600"/>
+            <a:ext cx="1903501" cy="3931920"/>
+          </a:xfrm>
+          <a:prstGeom prst="rect">
+            <a:avLst/>
+          </a:prstGeom>
+        </p:spPr>
+      </p:pic>
+      <p:sp>
+        <p:nvSpPr>
+          <p:cNvPr id="10" name="Text 4"/>
+          <p:cNvSpPr txBox="1"/>
+          <p:nvPr/>
+        </p:nvSpPr>
+        <p:spPr>
+          <a:xfrm>
+            <a:off x="8926830" y="5413248"/>
+            <a:ext cx="2530602" cy="914400"/>
+          </a:xfrm>
+          <a:prstGeom prst="rect">
+            <a:avLst/>
+          </a:prstGeom>
+          <a:noFill/>
+          <a:ln/>
+        </p:spPr>
+        <p:txBody>
+          <a:bodyPr wrap="square" lIns="0" tIns="0" rIns="0" bIns="0" rtlCol="0" anchor="t"/>
+          <a:lstStyle/>
+          <a:p>
+            <a:pPr algn="ctr" indent="0" marL="0">
+              <a:buNone/>
+            </a:pPr>
+            <a:r>
+              <a:rPr lang="en-US" sz="1250" b="1" dirty="0">
+                <a:solidFill>
+                  <a:srgbClr val="1F1D1A"/>
+                </a:solidFill>
+              </a:rPr>
+              <a:t>Empty state</a:t>
+            </a:r>
+            <a:endParaRPr lang="en-US" sz="1250" dirty="0"/>
+          </a:p>
+          <a:p>
+            <a:pPr algn="ctr" indent="0" marL="0">
+              <a:buNone/>
+            </a:pPr>
+            <a:r>
+              <a:rPr lang="en-US" sz="1050" dirty="0">
+                <a:solidFill>
+                  <a:srgbClr val="4A4438"/>
+                </a:solidFill>
+              </a:rPr>
+              <a:t>Names nearby unreviewed shops and asks the user to be first.</a:t>
+            </a:r>
+            <a:endParaRPr lang="en-US" sz="1250" dirty="0"/>
+          </a:p>
+        </p:txBody>
+      </p:sp>
+      <p:sp>
+        <p:nvSpPr>
+          <p:cNvPr id="25" name="Slide Number Placeholder 0"/>
+          <p:cNvSpPr>
+            <a:spLocks noGrp="1"/>
+          </p:cNvSpPr>
+          <p:nvPr>
+            <p:ph type="sldNum" sz="quarter" idx="4294967295"/>
+          </p:nvPr>
+        </p:nvSpPr>
+        <p:spPr>
+          <a:xfrm>
+            <a:off x="11521440" y="6355080"/>
+            <a:ext cx="800000" cy="300000"/>
+          </a:xfrm>
+          <a:prstGeom prst="rect">
+            <a:avLst/>
+          </a:prstGeom>
+          <a:extLst>
+            <a:ext uri="{C572A759-6A51-4108-AA02-DFA0A04FC94B}">
+              <ma14:wrappingTextBoxFlag xmlns:ma14="http://schemas.microsoft.com/office/mac/drawingml/2011/main" val="0"/>
+            </a:ext>
+          </a:extLst>
+        </p:spPr>
+        <p:txBody>
+          <a:bodyPr/>
+          <a:lstStyle>
+            <a:lvl1pPr>
+              <a:defRPr sz="1100">
+                <a:solidFill>
+                  <a:schemeClr val="accent3"/>
+                </a:solidFill>
+              </a:defRPr>
+            </a:lvl1pPr>
+          </a:lstStyle>
+          <a:p>
+            <a:pPr algn="l"/>
+            <a:fld id="{F7021451-1387-4CA6-816F-3879F97B5CBC}" type="slidenum">
+              <a:rPr b="0" lang="en-US"/>
+              <a:t>10</a:t>
+            </a:fld>
+            <a:endParaRPr lang="en-US"/>
+          </a:p>
+        </p:txBody>
+      </p:sp>
+    </p:spTree>
+  </p:cSld>
+  <p:clrMapOvr>
+    <a:masterClrMapping/>
+  </p:clrMapOvr>
+</p:sld>
+</file>
+
+<file path=ppt/slides/slide11.xml><?xml version="1.0" encoding="utf-8"?>
+<p:sld xmlns:a="http://schemas.openxmlformats.org/drawingml/2006/main" xmlns:r="http://schemas.openxmlformats.org/officeDocument/2006/relationships" xmlns:p="http://schemas.openxmlformats.org/presentationml/2006/main">
+  <p:cSld name="Slide 11">
+    <p:spTree>
+      <p:nvGrpSpPr>
+        <p:cNvPr id="1" name=""/>
+        <p:cNvGrpSpPr/>
+        <p:nvPr/>
+      </p:nvGrpSpPr>
+      <p:grpSpPr>
+        <a:xfrm>
+          <a:off x="0" y="0"/>
+          <a:ext cx="0" cy="0"/>
+          <a:chOff x="0" y="0"/>
+          <a:chExt cx="0" cy="0"/>
+        </a:xfrm>
+      </p:grpSpPr>
+      <p:sp>
+        <p:nvSpPr>
+          <p:cNvPr id="2" name="Text 1"/>
+          <p:cNvSpPr/>
+          <p:nvPr>
+            <p:ph idx="101" type="title" hasCustomPrompt="1"/>
+          </p:nvPr>
+        </p:nvSpPr>
+        <p:spPr>
+          <a:xfrm>
+            <a:off x="731520" y="411480"/>
+            <a:ext cx="10698480" cy="594360"/>
+          </a:xfrm>
+          <a:prstGeom prst="rect">
+            <a:avLst/>
+          </a:prstGeom>
+          <a:noFill/>
+          <a:ln/>
+        </p:spPr>
+        <p:txBody>
+          <a:bodyPr wrap="square" rtlCol="0" anchor="ctr"/>
+          <a:lstStyle/>
+          <a:p>
+            <a:pPr algn="l" indent="0" marL="0">
+              <a:buNone/>
+            </a:pPr>
+            <a:r>
+              <a:rPr lang="en-US" sz="3000" b="1" dirty="0">
+                <a:solidFill>
+                  <a:schemeClr val="tx1"/>
+                </a:solidFill>
+              </a:rPr>
+              <a:t>What was harder than expected</a:t>
+            </a:r>
+            <a:endParaRPr lang="en-US" sz="3000" dirty="0"/>
+          </a:p>
+        </p:txBody>
+      </p:sp>
+      <p:sp>
+        <p:nvSpPr>
+          <p:cNvPr id="3" name="Text 1"/>
+          <p:cNvSpPr/>
+          <p:nvPr>
+            <p:ph idx="102" type="body" hasCustomPrompt="1"/>
+          </p:nvPr>
+        </p:nvSpPr>
+        <p:spPr>
+          <a:xfrm>
+            <a:off x="731520" y="1417320"/>
+            <a:ext cx="10698480" cy="4754880"/>
+          </a:xfrm>
+          <a:prstGeom prst="rect">
+            <a:avLst/>
+          </a:prstGeom>
+          <a:noFill/>
+          <a:ln/>
+        </p:spPr>
+        <p:txBody>
+          <a:bodyPr wrap="square" rtlCol="0" anchor="t"/>
+          <a:lstStyle/>
+          <a:p>
+            <a:pPr marL="342900" indent="-342900">
+              <a:spcAft>
+                <a:spcPts val="1000"/>
+              </a:spcAft>
+              <a:buSzPct val="100000"/>
+              <a:buChar char="•"/>
+            </a:pPr>
+            <a:r>
+              <a:rPr lang="en-US" sz="1700" dirty="0">
+                <a:solidFill>
+                  <a:schemeClr val="tx2"/>
+                </a:solidFill>
+              </a:rPr>
+              <a:t>A Lambda inside a VPC has no route to the internet. Our first design called Cognito from inside the function, which meant a NAT gateway at about $32/month. Moving validation to the API Gateway authorizer removed the dependency entirely.</a:t>
+            </a:r>
+            <a:endParaRPr lang="en-US" sz="1700" dirty="0"/>
+          </a:p>
+          <a:p>
+            <a:pPr marL="342900" indent="-342900">
+              <a:spcAft>
+                <a:spcPts val="1000"/>
+              </a:spcAft>
+              <a:buSzPct val="100000"/>
+              <a:buChar char="•"/>
+            </a:pPr>
+            <a:r>
+              <a:rPr lang="en-US" sz="1700" dirty="0">
+                <a:solidFill>
+                  <a:schemeClr val="tx2"/>
+                </a:solidFill>
+              </a:rPr>
+              <a:t>CloudFormation refused the stack over a circular dependency: every function referenced the photo bucket, while the bucket referenced the thumbnail function for its event trigger. Fixed by naming the bucket deterministically and declaring the S3 notification explicitly.</a:t>
+            </a:r>
+            <a:endParaRPr lang="en-US" sz="1700" dirty="0"/>
+          </a:p>
+          <a:p>
+            <a:pPr marL="342900" indent="-342900">
+              <a:spcAft>
+                <a:spcPts val="1000"/>
+              </a:spcAft>
+              <a:buSzPct val="100000"/>
+              <a:buChar char="•"/>
+            </a:pPr>
+            <a:r>
+              <a:rPr lang="en-US" sz="1700" dirty="0">
+                <a:solidFill>
+                  <a:schemeClr val="tx2"/>
+                </a:solidFill>
+              </a:rPr>
+              <a:t>An organisation policy denies most services in us-east-1, so the stack runs in us-east-2. A service control policy cannot be overridden by IAM permissions.</a:t>
+            </a:r>
+            <a:endParaRPr lang="en-US" sz="1700" dirty="0"/>
+          </a:p>
+          <a:p>
+            <a:pPr marL="342900" indent="-342900">
+              <a:spcAft>
+                <a:spcPts val="1000"/>
+              </a:spcAft>
+              <a:buSzPct val="100000"/>
+              <a:buChar char="•"/>
+            </a:pPr>
+            <a:r>
+              <a:rPr lang="en-US" sz="1700" dirty="0">
+                <a:solidFill>
+                  <a:schemeClr val="tx2"/>
+                </a:solidFill>
+              </a:rPr>
+              <a:t>Expressing "one review per unmodified drink" took a partial unique index rather than a plain constraint, since modified drinks are deliberately allowed to duplicate.</a:t>
+            </a:r>
+            <a:endParaRPr lang="en-US" sz="1700" dirty="0"/>
+          </a:p>
+        </p:txBody>
+      </p:sp>
+      <p:sp>
+        <p:nvSpPr>
+          <p:cNvPr id="25" name="Slide Number Placeholder 0"/>
+          <p:cNvSpPr>
+            <a:spLocks noGrp="1"/>
+          </p:cNvSpPr>
+          <p:nvPr>
+            <p:ph type="sldNum" sz="quarter" idx="4294967295"/>
+          </p:nvPr>
+        </p:nvSpPr>
+        <p:spPr>
+          <a:xfrm>
+            <a:off x="11521440" y="6355080"/>
+            <a:ext cx="800000" cy="300000"/>
+          </a:xfrm>
+          <a:prstGeom prst="rect">
+            <a:avLst/>
+          </a:prstGeom>
+          <a:extLst>
+            <a:ext uri="{C572A759-6A51-4108-AA02-DFA0A04FC94B}">
+              <ma14:wrappingTextBoxFlag xmlns:ma14="http://schemas.microsoft.com/office/mac/drawingml/2011/main" val="0"/>
+            </a:ext>
+          </a:extLst>
+        </p:spPr>
+        <p:txBody>
+          <a:bodyPr/>
+          <a:lstStyle>
+            <a:lvl1pPr>
+              <a:defRPr sz="1100">
+                <a:solidFill>
+                  <a:schemeClr val="accent3"/>
+                </a:solidFill>
+              </a:defRPr>
+            </a:lvl1pPr>
+          </a:lstStyle>
+          <a:p>
+            <a:pPr algn="l"/>
+            <a:fld id="{F7021451-1387-4CA6-816F-3879F97B5CBC}" type="slidenum">
+              <a:rPr b="0" lang="en-US"/>
+              <a:t>11</a:t>
+            </a:fld>
+            <a:endParaRPr lang="en-US"/>
+          </a:p>
+        </p:txBody>
+      </p:sp>
+    </p:spTree>
+  </p:cSld>
+  <p:clrMapOvr>
+    <a:masterClrMapping/>
+  </p:clrMapOvr>
+</p:sld>
+</file>
+
+<file path=ppt/slides/slide12.xml><?xml version="1.0" encoding="utf-8"?>
+<p:sld xmlns:a="http://schemas.openxmlformats.org/drawingml/2006/main" xmlns:r="http://schemas.openxmlformats.org/officeDocument/2006/relationships" xmlns:p="http://schemas.openxmlformats.org/presentationml/2006/main">
+  <p:cSld name="Slide 12">
+    <p:spTree>
+      <p:nvGrpSpPr>
+        <p:cNvPr id="1" name=""/>
+        <p:cNvGrpSpPr/>
+        <p:nvPr/>
+      </p:nvGrpSpPr>
+      <p:grpSpPr>
+        <a:xfrm>
+          <a:off x="0" y="0"/>
+          <a:ext cx="0" cy="0"/>
+          <a:chOff x="0" y="0"/>
+          <a:chExt cx="0" cy="0"/>
+        </a:xfrm>
+      </p:grpSpPr>
+      <p:sp>
+        <p:nvSpPr>
+          <p:cNvPr id="2" name="Text 1"/>
+          <p:cNvSpPr/>
+          <p:nvPr>
+            <p:ph idx="101" type="title" hasCustomPrompt="1"/>
+          </p:nvPr>
+        </p:nvSpPr>
+        <p:spPr>
+          <a:xfrm>
+            <a:off x="731520" y="411480"/>
+            <a:ext cx="10698480" cy="594360"/>
+          </a:xfrm>
+          <a:prstGeom prst="rect">
+            <a:avLst/>
+          </a:prstGeom>
+          <a:noFill/>
+          <a:ln/>
+        </p:spPr>
+        <p:txBody>
+          <a:bodyPr wrap="square" rtlCol="0" anchor="ctr"/>
+          <a:lstStyle/>
+          <a:p>
+            <a:pPr algn="l" indent="0" marL="0">
+              <a:buNone/>
+            </a:pPr>
+            <a:r>
+              <a:rPr lang="en-US" sz="3000" b="1" dirty="0">
+                <a:solidFill>
+                  <a:schemeClr val="tx1"/>
+                </a:solidFill>
+              </a:rPr>
+              <a:t>Remaining work, risks, and the plan</a:t>
+            </a:r>
+            <a:endParaRPr lang="en-US" sz="3000" dirty="0"/>
+          </a:p>
+        </p:txBody>
+      </p:sp>
+      <p:sp>
+        <p:nvSpPr>
+          <p:cNvPr id="3" name="Text 1"/>
+          <p:cNvSpPr/>
+          <p:nvPr>
+            <p:ph idx="102" type="body" hasCustomPrompt="1"/>
+          </p:nvPr>
+        </p:nvSpPr>
+        <p:spPr>
+          <a:xfrm>
+            <a:off x="731520" y="1417320"/>
+            <a:ext cx="10698480" cy="4754880"/>
+          </a:xfrm>
+          <a:prstGeom prst="rect">
+            <a:avLst/>
+          </a:prstGeom>
+          <a:noFill/>
+          <a:ln/>
+        </p:spPr>
+        <p:txBody>
+          <a:bodyPr wrap="square" rtlCol="0" anchor="t"/>
+          <a:lstStyle/>
+          <a:p>
+            <a:pPr indent="0" marL="0">
+              <a:spcAft>
+                <a:spcPts val="400"/>
+              </a:spcAft>
+              <a:buNone/>
+            </a:pPr>
+            <a:r>
+              <a:rPr lang="en-US" sz="1700" b="1" dirty="0">
+                <a:solidFill>
+                  <a:srgbClr val="4A7C62"/>
+                </a:solidFill>
+              </a:rPr>
+              <a:t>To build</a:t>
+            </a:r>
+            <a:endParaRPr lang="en-US" sz="1700" dirty="0"/>
+          </a:p>
+          <a:p>
+            <a:pPr marL="342900" indent="-342900">
+              <a:spcAft>
+                <a:spcPts val="1000"/>
+              </a:spcAft>
+              <a:buSzPct val="100000"/>
+              <a:buChar char="•"/>
+            </a:pPr>
+            <a:r>
+              <a:rPr lang="en-US" sz="1700" dirty="0">
+                <a:solidFill>
+                  <a:schemeClr val="tx2"/>
+                </a:solidFill>
+              </a:rPr>
+              <a:t>Expo client replacing the demo page</a:t>
+            </a:r>
+            <a:endParaRPr lang="en-US" sz="1700" dirty="0"/>
+          </a:p>
+          <a:p>
+            <a:pPr marL="342900" indent="-342900">
+              <a:spcAft>
+                <a:spcPts val="1000"/>
+              </a:spcAft>
+              <a:buSzPct val="100000"/>
+              <a:buChar char="•"/>
+            </a:pPr>
+            <a:r>
+              <a:rPr lang="en-US" sz="1700" dirty="0">
+                <a:solidFill>
+                  <a:schemeClr val="tx2"/>
+                </a:solidFill>
+              </a:rPr>
+              <a:t>Menu import so drinks are not seeded by hand</a:t>
+            </a:r>
+            <a:endParaRPr lang="en-US" sz="1700" dirty="0"/>
+          </a:p>
+          <a:p>
+            <a:pPr marL="342900" indent="-342900">
+              <a:spcAft>
+                <a:spcPts val="1000"/>
+              </a:spcAft>
+              <a:buSzPct val="100000"/>
+              <a:buChar char="•"/>
+            </a:pPr>
+            <a:r>
+              <a:rPr lang="en-US" sz="1700" dirty="0">
+                <a:solidFill>
+                  <a:schemeClr val="tx2"/>
+                </a:solidFill>
+              </a:rPr>
+              <a:t>CloudFront in front of the photo bucket</a:t>
+            </a:r>
+            <a:endParaRPr lang="en-US" sz="1700" dirty="0"/>
+          </a:p>
+          <a:p>
+            <a:pPr indent="0" marL="0">
+              <a:buNone/>
+            </a:pPr>
+            <a:endParaRPr lang="en-US" sz="1700" dirty="0"/>
+          </a:p>
+          <a:p>
+            <a:pPr indent="0" marL="0">
+              <a:spcAft>
+                <a:spcPts val="400"/>
+              </a:spcAft>
+              <a:buNone/>
+            </a:pPr>
+            <a:r>
+              <a:rPr lang="en-US" sz="1700" b="1" dirty="0">
+                <a:solidFill>
+                  <a:srgbClr val="A8503C"/>
+                </a:solidFill>
+              </a:rPr>
+              <a:t>Risks</a:t>
+            </a:r>
+            <a:endParaRPr lang="en-US" sz="1700" dirty="0"/>
+          </a:p>
+          <a:p>
+            <a:pPr marL="342900" indent="-342900">
+              <a:spcAft>
+                <a:spcPts val="1000"/>
+              </a:spcAft>
+              <a:buSzPct val="100000"/>
+              <a:buChar char="•"/>
+            </a:pPr>
+            <a:r>
+              <a:rPr lang="en-US" sz="1700" dirty="0">
+                <a:solidFill>
+                  <a:schemeClr val="tx2"/>
+                </a:solidFill>
+              </a:rPr>
+              <a:t>Menu data entry is manual work, not a coding problem — mitigated by seeding a handful of shops rather than all of DFW</a:t>
+            </a:r>
+            <a:endParaRPr lang="en-US" sz="1700" dirty="0"/>
+          </a:p>
+          <a:p>
+            <a:pPr marL="342900" indent="-342900">
+              <a:spcAft>
+                <a:spcPts val="1000"/>
+              </a:spcAft>
+              <a:buSzPct val="100000"/>
+              <a:buChar char="•"/>
+            </a:pPr>
+            <a:r>
+              <a:rPr lang="en-US" sz="1700" dirty="0">
+                <a:solidFill>
+                  <a:schemeClr val="tx2"/>
+                </a:solidFill>
+              </a:rPr>
+              <a:t>Two-person team with overlapping deadlines; scope is deliberately narrow</a:t>
+            </a:r>
+            <a:endParaRPr lang="en-US" sz="1700" dirty="0"/>
+          </a:p>
+        </p:txBody>
+      </p:sp>
+      <p:sp>
+        <p:nvSpPr>
+          <p:cNvPr id="25" name="Slide Number Placeholder 0"/>
+          <p:cNvSpPr>
+            <a:spLocks noGrp="1"/>
+          </p:cNvSpPr>
+          <p:nvPr>
+            <p:ph type="sldNum" sz="quarter" idx="4294967295"/>
+          </p:nvPr>
+        </p:nvSpPr>
+        <p:spPr>
+          <a:xfrm>
+            <a:off x="11521440" y="6355080"/>
+            <a:ext cx="800000" cy="300000"/>
+          </a:xfrm>
+          <a:prstGeom prst="rect">
+            <a:avLst/>
+          </a:prstGeom>
+          <a:extLst>
+            <a:ext uri="{C572A759-6A51-4108-AA02-DFA0A04FC94B}">
+              <ma14:wrappingTextBoxFlag xmlns:ma14="http://schemas.microsoft.com/office/mac/drawingml/2011/main" val="0"/>
+            </a:ext>
+          </a:extLst>
+        </p:spPr>
+        <p:txBody>
+          <a:bodyPr/>
+          <a:lstStyle>
+            <a:lvl1pPr>
+              <a:defRPr sz="1100">
+                <a:solidFill>
+                  <a:schemeClr val="accent3"/>
+                </a:solidFill>
+              </a:defRPr>
+            </a:lvl1pPr>
+          </a:lstStyle>
+          <a:p>
+            <a:pPr algn="l"/>
+            <a:fld id="{F7021451-1387-4CA6-816F-3879F97B5CBC}" type="slidenum">
+              <a:rPr b="0" lang="en-US"/>
+              <a:t>12</a:t>
+            </a:fld>
+            <a:endParaRPr lang="en-US"/>
           </a:p>
         </p:txBody>
       </p:sp>
@@ -5256,7 +6396,7 @@
                   <a:schemeClr val="tx1"/>
                 </a:solidFill>
               </a:rPr>
-              <a:t>What it will look like</a:t>
+              <a:t>The app: arriving</a:t>
             </a:r>
             <a:endParaRPr lang="en-US" sz="3000" dirty="0"/>
           </a:p>
@@ -5270,8 +6410,8 @@
         </p:nvSpPr>
         <p:spPr>
           <a:xfrm>
-            <a:off x="731520" y="1115568"/>
-            <a:ext cx="10698480" cy="274320"/>
+            <a:off x="731520" y="1097280"/>
+            <a:ext cx="10698480" cy="256032"/>
           </a:xfrm>
           <a:prstGeom prst="rect">
             <a:avLst/>
@@ -5287,20 +6427,20 @@
               <a:buNone/>
             </a:pPr>
             <a:r>
-              <a:rPr lang="en-US" sz="1300" i="1" dirty="0">
+              <a:rPr lang="en-US" sz="1200" i="1" dirty="0">
                 <a:solidFill>
                   <a:srgbClr val="6B6558"/>
                 </a:solidFill>
               </a:rPr>
-              <a:t>Interface design — not yet built. The working prototype demonstrated today is the API and data layer.</a:t>
-            </a:r>
-            <a:endParaRPr lang="en-US" sz="1300" dirty="0"/>
+              <a:t>Interface design — not yet built. Today’s working prototype is the API and data layer behind it.</a:t>
+            </a:r>
+            <a:endParaRPr lang="en-US" sz="1200" dirty="0"/>
           </a:p>
         </p:txBody>
       </p:sp>
       <p:pic>
         <p:nvPicPr>
-          <p:cNvPr id="4" name="Feed" descr="/home/claude/restored/sip-repo/docs/screens/screen-02.png">    </p:cNvPr>
+          <p:cNvPr id="4" name="Launch" descr="/home/claude/restored/sip-repo/docs/screens/screen-01.png">    </p:cNvPr>
           <p:cNvPicPr>
             <a:picLocks noChangeAspect="1"/>
           </p:cNvPicPr>
@@ -5314,8 +6454,8 @@
         </p:blipFill>
         <p:spPr>
           <a:xfrm>
-            <a:off x="2483219" y="1600200"/>
-            <a:ext cx="2102705" cy="4343400"/>
+            <a:off x="1045070" y="1481328"/>
+            <a:ext cx="1903501" cy="3931920"/>
           </a:xfrm>
           <a:prstGeom prst="rect">
             <a:avLst/>
@@ -5330,8 +6470,8 @@
         </p:nvSpPr>
         <p:spPr>
           <a:xfrm>
-            <a:off x="2483219" y="6016752"/>
-            <a:ext cx="2102705" cy="274320"/>
+            <a:off x="731520" y="5522976"/>
+            <a:ext cx="2530602" cy="914400"/>
           </a:xfrm>
           <a:prstGeom prst="rect">
             <a:avLst/>
@@ -5340,27 +6480,41 @@
           <a:ln/>
         </p:spPr>
         <p:txBody>
-          <a:bodyPr wrap="square" lIns="0" tIns="0" rIns="0" bIns="0" rtlCol="0" anchor="ctr"/>
+          <a:bodyPr wrap="square" lIns="0" tIns="0" rIns="0" bIns="0" rtlCol="0" anchor="t"/>
           <a:lstStyle/>
           <a:p>
             <a:pPr algn="ctr" indent="0" marL="0">
               <a:buNone/>
             </a:pPr>
             <a:r>
-              <a:rPr lang="en-US" sz="1200" dirty="0">
+              <a:rPr lang="en-US" sz="1250" b="1" dirty="0">
+                <a:solidFill>
+                  <a:srgbClr val="1F1D1A"/>
+                </a:solidFill>
+              </a:rPr>
+              <a:t>Launch</a:t>
+            </a:r>
+            <a:endParaRPr lang="en-US" sz="1250" dirty="0"/>
+          </a:p>
+          <a:p>
+            <a:pPr algn="ctr" indent="0" marL="0">
+              <a:buNone/>
+            </a:pPr>
+            <a:r>
+              <a:rPr lang="en-US" sz="1050" dirty="0">
                 <a:solidFill>
                   <a:srgbClr val="4A4438"/>
                 </a:solidFill>
               </a:rPr>
-              <a:t>Feed</a:t>
-            </a:r>
-            <a:endParaRPr lang="en-US" sz="1200" dirty="0"/>
+              <a:t>Wordmark and a rotating line ride up on the pour, then the feed.</a:t>
+            </a:r>
+            <a:endParaRPr lang="en-US" sz="1250" dirty="0"/>
           </a:p>
         </p:txBody>
       </p:sp>
       <p:pic>
         <p:nvPicPr>
-          <p:cNvPr id="6" name="Best in area" descr="/home/claude/restored/sip-repo/docs/screens/screen-08.png">    </p:cNvPr>
+          <p:cNvPr id="6" name="Feed" descr="/home/claude/restored/sip-repo/docs/screens/screen-02.png">    </p:cNvPr>
           <p:cNvPicPr>
             <a:picLocks noChangeAspect="1"/>
           </p:cNvPicPr>
@@ -5374,8 +6528,8 @@
         </p:blipFill>
         <p:spPr>
           <a:xfrm>
-            <a:off x="5043124" y="1600200"/>
-            <a:ext cx="2102705" cy="4343400"/>
+            <a:off x="3776840" y="1481328"/>
+            <a:ext cx="1903501" cy="3931920"/>
           </a:xfrm>
           <a:prstGeom prst="rect">
             <a:avLst/>
@@ -5390,8 +6544,8 @@
         </p:nvSpPr>
         <p:spPr>
           <a:xfrm>
-            <a:off x="5043124" y="6016752"/>
-            <a:ext cx="2102705" cy="274320"/>
+            <a:off x="3463290" y="5522976"/>
+            <a:ext cx="2530602" cy="914400"/>
           </a:xfrm>
           <a:prstGeom prst="rect">
             <a:avLst/>
@@ -5400,27 +6554,41 @@
           <a:ln/>
         </p:spPr>
         <p:txBody>
-          <a:bodyPr wrap="square" lIns="0" tIns="0" rIns="0" bIns="0" rtlCol="0" anchor="ctr"/>
+          <a:bodyPr wrap="square" lIns="0" tIns="0" rIns="0" bIns="0" rtlCol="0" anchor="t"/>
           <a:lstStyle/>
           <a:p>
             <a:pPr algn="ctr" indent="0" marL="0">
               <a:buNone/>
             </a:pPr>
             <a:r>
-              <a:rPr lang="en-US" sz="1200" dirty="0">
+              <a:rPr lang="en-US" sz="1250" b="1" dirty="0">
+                <a:solidFill>
+                  <a:srgbClr val="1F1D1A"/>
+                </a:solidFill>
+              </a:rPr>
+              <a:t>Feed</a:t>
+            </a:r>
+            <a:endParaRPr lang="en-US" sz="1250" dirty="0"/>
+          </a:p>
+          <a:p>
+            <a:pPr algn="ctr" indent="0" marL="0">
+              <a:buNone/>
+            </a:pPr>
+            <a:r>
+              <a:rPr lang="en-US" sz="1050" dirty="0">
                 <a:solidFill>
                   <a:srgbClr val="4A4438"/>
                 </a:solidFill>
               </a:rPr>
-              <a:t>Best in area</a:t>
-            </a:r>
-            <a:endParaRPr lang="en-US" sz="1200" dirty="0"/>
+              <a:t>The drink is the headline; the shop sits under it in grey.</a:t>
+            </a:r>
+            <a:endParaRPr lang="en-US" sz="1250" dirty="0"/>
           </a:p>
         </p:txBody>
       </p:sp>
       <p:pic>
         <p:nvPicPr>
-          <p:cNvPr id="8" name="Location detail" descr="/home/claude/restored/sip-repo/docs/screens/screen-06.png">    </p:cNvPr>
+          <p:cNvPr id="8" name="Replies" descr="/home/claude/restored/sip-repo/docs/screens/screen-03.png">    </p:cNvPr>
           <p:cNvPicPr>
             <a:picLocks noChangeAspect="1"/>
           </p:cNvPicPr>
@@ -5434,8 +6602,8 @@
         </p:blipFill>
         <p:spPr>
           <a:xfrm>
-            <a:off x="7603028" y="1600200"/>
-            <a:ext cx="2102705" cy="4343400"/>
+            <a:off x="6508610" y="1481328"/>
+            <a:ext cx="1903501" cy="3931920"/>
           </a:xfrm>
           <a:prstGeom prst="rect">
             <a:avLst/>
@@ -5450,8 +6618,8 @@
         </p:nvSpPr>
         <p:spPr>
           <a:xfrm>
-            <a:off x="7603028" y="6016752"/>
-            <a:ext cx="2102705" cy="274320"/>
+            <a:off x="6195060" y="5522976"/>
+            <a:ext cx="2530602" cy="914400"/>
           </a:xfrm>
           <a:prstGeom prst="rect">
             <a:avLst/>
@@ -5460,21 +6628,109 @@
           <a:ln/>
         </p:spPr>
         <p:txBody>
-          <a:bodyPr wrap="square" lIns="0" tIns="0" rIns="0" bIns="0" rtlCol="0" anchor="ctr"/>
+          <a:bodyPr wrap="square" lIns="0" tIns="0" rIns="0" bIns="0" rtlCol="0" anchor="t"/>
           <a:lstStyle/>
           <a:p>
             <a:pPr algn="ctr" indent="0" marL="0">
               <a:buNone/>
             </a:pPr>
             <a:r>
-              <a:rPr lang="en-US" sz="1200" dirty="0">
+              <a:rPr lang="en-US" sz="1250" b="1" dirty="0">
+                <a:solidFill>
+                  <a:srgbClr val="1F1D1A"/>
+                </a:solidFill>
+              </a:rPr>
+              <a:t>Replies</a:t>
+            </a:r>
+            <a:endParaRPr lang="en-US" sz="1250" dirty="0"/>
+          </a:p>
+          <a:p>
+            <a:pPr algn="ctr" indent="0" marL="0">
+              <a:buNone/>
+            </a:pPr>
+            <a:r>
+              <a:rPr lang="en-US" sz="1050" dirty="0">
                 <a:solidFill>
                   <a:srgbClr val="4A4438"/>
                 </a:solidFill>
               </a:rPr>
-              <a:t>Location detail</a:t>
-            </a:r>
-            <a:endParaRPr lang="en-US" sz="1200" dirty="0"/>
+              <a:t>Questions answered by whoever was just there, threaded under the review.</a:t>
+            </a:r>
+            <a:endParaRPr lang="en-US" sz="1250" dirty="0"/>
+          </a:p>
+        </p:txBody>
+      </p:sp>
+      <p:pic>
+        <p:nvPicPr>
+          <p:cNvPr id="10" name="Post tab" descr="/home/claude/restored/sip-repo/docs/screens/screen-04.png">    </p:cNvPr>
+          <p:cNvPicPr>
+            <a:picLocks noChangeAspect="1"/>
+          </p:cNvPicPr>
+          <p:nvPr/>
+        </p:nvPicPr>
+        <p:blipFill>
+          <a:blip r:embed="rId4"/>
+          <a:stretch>
+            <a:fillRect/>
+          </a:stretch>
+        </p:blipFill>
+        <p:spPr>
+          <a:xfrm>
+            <a:off x="9240380" y="1481328"/>
+            <a:ext cx="1903501" cy="3931920"/>
+          </a:xfrm>
+          <a:prstGeom prst="rect">
+            <a:avLst/>
+          </a:prstGeom>
+        </p:spPr>
+      </p:pic>
+      <p:sp>
+        <p:nvSpPr>
+          <p:cNvPr id="11" name="Text 5"/>
+          <p:cNvSpPr txBox="1"/>
+          <p:nvPr/>
+        </p:nvSpPr>
+        <p:spPr>
+          <a:xfrm>
+            <a:off x="8926830" y="5522976"/>
+            <a:ext cx="2530602" cy="914400"/>
+          </a:xfrm>
+          <a:prstGeom prst="rect">
+            <a:avLst/>
+          </a:prstGeom>
+          <a:noFill/>
+          <a:ln/>
+        </p:spPr>
+        <p:txBody>
+          <a:bodyPr wrap="square" lIns="0" tIns="0" rIns="0" bIns="0" rtlCol="0" anchor="t"/>
+          <a:lstStyle/>
+          <a:p>
+            <a:pPr algn="ctr" indent="0" marL="0">
+              <a:buNone/>
+            </a:pPr>
+            <a:r>
+              <a:rPr lang="en-US" sz="1250" b="1" dirty="0">
+                <a:solidFill>
+                  <a:srgbClr val="1F1D1A"/>
+                </a:solidFill>
+              </a:rPr>
+              <a:t>Post tab</a:t>
+            </a:r>
+            <a:endParaRPr lang="en-US" sz="1250" dirty="0"/>
+          </a:p>
+          <a:p>
+            <a:pPr algn="ctr" indent="0" marL="0">
+              <a:buNone/>
+            </a:pPr>
+            <a:r>
+              <a:rPr lang="en-US" sz="1050" dirty="0">
+                <a:solidFill>
+                  <a:srgbClr val="4A4438"/>
+                </a:solidFill>
+              </a:rPr>
+              <a:t>No blank composer anywhere — every post starts with a drink.</a:t>
+            </a:r>
+            <a:endParaRPr lang="en-US" sz="1250" dirty="0"/>
           </a:p>
         </p:txBody>
       </p:sp>
@@ -5580,24 +6836,46 @@
                   <a:schemeClr val="tx1"/>
                 </a:solidFill>
               </a:rPr>
-              <a:t>What was harder than expected</a:t>
+              <a:t>The app: finding a drink</a:t>
             </a:r>
             <a:endParaRPr lang="en-US" sz="3000" dirty="0"/>
           </a:p>
         </p:txBody>
       </p:sp>
-      <p:sp>
-        <p:nvSpPr>
-          <p:cNvPr id="3" name="Text 1"/>
-          <p:cNvSpPr/>
-          <p:nvPr>
-            <p:ph idx="102" type="body" hasCustomPrompt="1"/>
-          </p:nvPr>
-        </p:nvSpPr>
-        <p:spPr>
-          <a:xfrm>
-            <a:off x="731520" y="1417320"/>
-            <a:ext cx="10698480" cy="4754880"/>
+      <p:pic>
+        <p:nvPicPr>
+          <p:cNvPr id="3" name="Compare" descr="/home/claude/restored/sip-repo/docs/screens/screen-07.png">    </p:cNvPr>
+          <p:cNvPicPr>
+            <a:picLocks noChangeAspect="1"/>
+          </p:cNvPicPr>
+          <p:nvPr/>
+        </p:nvPicPr>
+        <p:blipFill>
+          <a:blip r:embed="rId1"/>
+          <a:stretch>
+            <a:fillRect/>
+          </a:stretch>
+        </p:blipFill>
+        <p:spPr>
+          <a:xfrm>
+            <a:off x="771893" y="1371600"/>
+            <a:ext cx="1903501" cy="3931920"/>
+          </a:xfrm>
+          <a:prstGeom prst="rect">
+            <a:avLst/>
+          </a:prstGeom>
+        </p:spPr>
+      </p:pic>
+      <p:sp>
+        <p:nvSpPr>
+          <p:cNvPr id="4" name="Text 1"/>
+          <p:cNvSpPr txBox="1"/>
+          <p:nvPr/>
+        </p:nvSpPr>
+        <p:spPr>
+          <a:xfrm>
+            <a:off x="731520" y="5413248"/>
+            <a:ext cx="1984248" cy="914400"/>
           </a:xfrm>
           <a:prstGeom prst="rect">
             <a:avLst/>
@@ -5606,79 +6884,331 @@
           <a:ln/>
         </p:spPr>
         <p:txBody>
-          <a:bodyPr wrap="square" rtlCol="0" anchor="t"/>
+          <a:bodyPr wrap="square" lIns="0" tIns="0" rIns="0" bIns="0" rtlCol="0" anchor="t"/>
           <a:lstStyle/>
           <a:p>
-            <a:pPr marL="342900" indent="-342900">
-              <a:spcAft>
-                <a:spcPts val="1000"/>
-              </a:spcAft>
-              <a:buSzPct val="100000"/>
-              <a:buChar char="•"/>
-            </a:pPr>
-            <a:r>
-              <a:rPr lang="en-US" sz="1700" dirty="0">
-                <a:solidFill>
-                  <a:schemeClr val="tx2"/>
-                </a:solidFill>
-              </a:rPr>
-              <a:t>A Lambda inside a VPC has no route to the internet. Our first design called Cognito from inside the function, which meant a NAT gateway at about $32/month. Moving validation to the API Gateway authorizer removed the dependency entirely.</a:t>
-            </a:r>
-            <a:endParaRPr lang="en-US" sz="1700" dirty="0"/>
-          </a:p>
-          <a:p>
-            <a:pPr marL="342900" indent="-342900">
-              <a:spcAft>
-                <a:spcPts val="1000"/>
-              </a:spcAft>
-              <a:buSzPct val="100000"/>
-              <a:buChar char="•"/>
-            </a:pPr>
-            <a:r>
-              <a:rPr lang="en-US" sz="1700" dirty="0">
-                <a:solidFill>
-                  <a:schemeClr val="tx2"/>
-                </a:solidFill>
-              </a:rPr>
-              <a:t>CloudFormation refused the stack over a circular dependency: every function referenced the photo bucket, while the bucket referenced the thumbnail function for its event trigger. Fixed by naming the bucket deterministically and declaring the S3 notification explicitly.</a:t>
-            </a:r>
-            <a:endParaRPr lang="en-US" sz="1700" dirty="0"/>
-          </a:p>
-          <a:p>
-            <a:pPr marL="342900" indent="-342900">
-              <a:spcAft>
-                <a:spcPts val="1000"/>
-              </a:spcAft>
-              <a:buSzPct val="100000"/>
-              <a:buChar char="•"/>
-            </a:pPr>
-            <a:r>
-              <a:rPr lang="en-US" sz="1700" dirty="0">
-                <a:solidFill>
-                  <a:schemeClr val="tx2"/>
-                </a:solidFill>
-              </a:rPr>
-              <a:t>An organisation policy denies most services in us-east-1, so the stack runs in us-east-2. A service control policy cannot be overridden by IAM permissions.</a:t>
-            </a:r>
-            <a:endParaRPr lang="en-US" sz="1700" dirty="0"/>
-          </a:p>
-          <a:p>
-            <a:pPr marL="342900" indent="-342900">
-              <a:spcAft>
-                <a:spcPts val="1000"/>
-              </a:spcAft>
-              <a:buSzPct val="100000"/>
-              <a:buChar char="•"/>
-            </a:pPr>
-            <a:r>
-              <a:rPr lang="en-US" sz="1700" dirty="0">
-                <a:solidFill>
-                  <a:schemeClr val="tx2"/>
-                </a:solidFill>
-              </a:rPr>
-              <a:t>Expressing "one review per unmodified drink" took a partial unique index rather than a plain constraint, since modified drinks are deliberately allowed to duplicate.</a:t>
-            </a:r>
-            <a:endParaRPr lang="en-US" sz="1700" dirty="0"/>
+            <a:pPr algn="ctr" indent="0" marL="0">
+              <a:buNone/>
+            </a:pPr>
+            <a:r>
+              <a:rPr lang="en-US" sz="1250" b="1" dirty="0">
+                <a:solidFill>
+                  <a:srgbClr val="1F1D1A"/>
+                </a:solidFill>
+              </a:rPr>
+              <a:t>Compare</a:t>
+            </a:r>
+            <a:endParaRPr lang="en-US" sz="1250" dirty="0"/>
+          </a:p>
+          <a:p>
+            <a:pPr algn="ctr" indent="0" marL="0">
+              <a:buNone/>
+            </a:pPr>
+            <a:r>
+              <a:rPr lang="en-US" sz="1050" dirty="0">
+                <a:solidFill>
+                  <a:srgbClr val="4A4438"/>
+                </a:solidFill>
+              </a:rPr>
+              <a:t>One drink, every shop that makes it, ranked on that drink alone.</a:t>
+            </a:r>
+            <a:endParaRPr lang="en-US" sz="1250" dirty="0"/>
+          </a:p>
+        </p:txBody>
+      </p:sp>
+      <p:pic>
+        <p:nvPicPr>
+          <p:cNvPr id="5" name="Best in area" descr="/home/claude/restored/sip-repo/docs/screens/screen-08.png">    </p:cNvPr>
+          <p:cNvPicPr>
+            <a:picLocks noChangeAspect="1"/>
+          </p:cNvPicPr>
+          <p:nvPr/>
+        </p:nvPicPr>
+        <p:blipFill>
+          <a:blip r:embed="rId2"/>
+          <a:stretch>
+            <a:fillRect/>
+          </a:stretch>
+        </p:blipFill>
+        <p:spPr>
+          <a:xfrm>
+            <a:off x="2957309" y="1371600"/>
+            <a:ext cx="1903501" cy="3931920"/>
+          </a:xfrm>
+          <a:prstGeom prst="rect">
+            <a:avLst/>
+          </a:prstGeom>
+        </p:spPr>
+      </p:pic>
+      <p:sp>
+        <p:nvSpPr>
+          <p:cNvPr id="6" name="Text 2"/>
+          <p:cNvSpPr txBox="1"/>
+          <p:nvPr/>
+        </p:nvSpPr>
+        <p:spPr>
+          <a:xfrm>
+            <a:off x="2916936" y="5413248"/>
+            <a:ext cx="1984248" cy="914400"/>
+          </a:xfrm>
+          <a:prstGeom prst="rect">
+            <a:avLst/>
+          </a:prstGeom>
+          <a:noFill/>
+          <a:ln/>
+        </p:spPr>
+        <p:txBody>
+          <a:bodyPr wrap="square" lIns="0" tIns="0" rIns="0" bIns="0" rtlCol="0" anchor="t"/>
+          <a:lstStyle/>
+          <a:p>
+            <a:pPr algn="ctr" indent="0" marL="0">
+              <a:buNone/>
+            </a:pPr>
+            <a:r>
+              <a:rPr lang="en-US" sz="1250" b="1" dirty="0">
+                <a:solidFill>
+                  <a:srgbClr val="1F1D1A"/>
+                </a:solidFill>
+              </a:rPr>
+              <a:t>Best in area</a:t>
+            </a:r>
+            <a:endParaRPr lang="en-US" sz="1250" dirty="0"/>
+          </a:p>
+          <a:p>
+            <a:pPr algn="ctr" indent="0" marL="0">
+              <a:buNone/>
+            </a:pPr>
+            <a:r>
+              <a:rPr lang="en-US" sz="1050" dirty="0">
+                <a:solidFill>
+                  <a:srgbClr val="4A4438"/>
+                </a:solidFill>
+              </a:rPr>
+              <a:t>Top ten by neighbourhood, with movement since last week.</a:t>
+            </a:r>
+            <a:endParaRPr lang="en-US" sz="1250" dirty="0"/>
+          </a:p>
+        </p:txBody>
+      </p:sp>
+      <p:pic>
+        <p:nvPicPr>
+          <p:cNvPr id="7" name="Trending" descr="/home/claude/restored/sip-repo/docs/screens/screen-09.png">    </p:cNvPr>
+          <p:cNvPicPr>
+            <a:picLocks noChangeAspect="1"/>
+          </p:cNvPicPr>
+          <p:nvPr/>
+        </p:nvPicPr>
+        <p:blipFill>
+          <a:blip r:embed="rId3"/>
+          <a:stretch>
+            <a:fillRect/>
+          </a:stretch>
+        </p:blipFill>
+        <p:spPr>
+          <a:xfrm>
+            <a:off x="5142725" y="1371600"/>
+            <a:ext cx="1903501" cy="3931920"/>
+          </a:xfrm>
+          <a:prstGeom prst="rect">
+            <a:avLst/>
+          </a:prstGeom>
+        </p:spPr>
+      </p:pic>
+      <p:sp>
+        <p:nvSpPr>
+          <p:cNvPr id="8" name="Text 3"/>
+          <p:cNvSpPr txBox="1"/>
+          <p:nvPr/>
+        </p:nvSpPr>
+        <p:spPr>
+          <a:xfrm>
+            <a:off x="5102352" y="5413248"/>
+            <a:ext cx="1984248" cy="914400"/>
+          </a:xfrm>
+          <a:prstGeom prst="rect">
+            <a:avLst/>
+          </a:prstGeom>
+          <a:noFill/>
+          <a:ln/>
+        </p:spPr>
+        <p:txBody>
+          <a:bodyPr wrap="square" lIns="0" tIns="0" rIns="0" bIns="0" rtlCol="0" anchor="t"/>
+          <a:lstStyle/>
+          <a:p>
+            <a:pPr algn="ctr" indent="0" marL="0">
+              <a:buNone/>
+            </a:pPr>
+            <a:r>
+              <a:rPr lang="en-US" sz="1250" b="1" dirty="0">
+                <a:solidFill>
+                  <a:srgbClr val="1F1D1A"/>
+                </a:solidFill>
+              </a:rPr>
+              <a:t>Trending</a:t>
+            </a:r>
+            <a:endParaRPr lang="en-US" sz="1250" dirty="0"/>
+          </a:p>
+          <a:p>
+            <a:pPr algn="ctr" indent="0" marL="0">
+              <a:buNone/>
+            </a:pPr>
+            <a:r>
+              <a:rPr lang="en-US" sz="1050" dirty="0">
+                <a:solidFill>
+                  <a:srgbClr val="4A4438"/>
+                </a:solidFill>
+              </a:rPr>
+              <a:t>Ranked by how fast reviews arrive, not by rating.</a:t>
+            </a:r>
+            <a:endParaRPr lang="en-US" sz="1250" dirty="0"/>
+          </a:p>
+        </p:txBody>
+      </p:sp>
+      <p:pic>
+        <p:nvPicPr>
+          <p:cNvPr id="9" name="Map" descr="/home/claude/restored/sip-repo/docs/screens/screen-05.png">    </p:cNvPr>
+          <p:cNvPicPr>
+            <a:picLocks noChangeAspect="1"/>
+          </p:cNvPicPr>
+          <p:nvPr/>
+        </p:nvPicPr>
+        <p:blipFill>
+          <a:blip r:embed="rId4"/>
+          <a:stretch>
+            <a:fillRect/>
+          </a:stretch>
+        </p:blipFill>
+        <p:spPr>
+          <a:xfrm>
+            <a:off x="7328141" y="1371600"/>
+            <a:ext cx="1903501" cy="3931920"/>
+          </a:xfrm>
+          <a:prstGeom prst="rect">
+            <a:avLst/>
+          </a:prstGeom>
+        </p:spPr>
+      </p:pic>
+      <p:sp>
+        <p:nvSpPr>
+          <p:cNvPr id="10" name="Text 4"/>
+          <p:cNvSpPr txBox="1"/>
+          <p:nvPr/>
+        </p:nvSpPr>
+        <p:spPr>
+          <a:xfrm>
+            <a:off x="7287768" y="5413248"/>
+            <a:ext cx="1984248" cy="914400"/>
+          </a:xfrm>
+          <a:prstGeom prst="rect">
+            <a:avLst/>
+          </a:prstGeom>
+          <a:noFill/>
+          <a:ln/>
+        </p:spPr>
+        <p:txBody>
+          <a:bodyPr wrap="square" lIns="0" tIns="0" rIns="0" bIns="0" rtlCol="0" anchor="t"/>
+          <a:lstStyle/>
+          <a:p>
+            <a:pPr algn="ctr" indent="0" marL="0">
+              <a:buNone/>
+            </a:pPr>
+            <a:r>
+              <a:rPr lang="en-US" sz="1250" b="1" dirty="0">
+                <a:solidFill>
+                  <a:srgbClr val="1F1D1A"/>
+                </a:solidFill>
+              </a:rPr>
+              <a:t>Map</a:t>
+            </a:r>
+            <a:endParaRPr lang="en-US" sz="1250" dirty="0"/>
+          </a:p>
+          <a:p>
+            <a:pPr algn="ctr" indent="0" marL="0">
+              <a:buNone/>
+            </a:pPr>
+            <a:r>
+              <a:rPr lang="en-US" sz="1050" dirty="0">
+                <a:solidFill>
+                  <a:srgbClr val="4A4438"/>
+                </a:solidFill>
+              </a:rPr>
+              <a:t>Score pins rather than logos; tapping one opens the shop below.</a:t>
+            </a:r>
+            <a:endParaRPr lang="en-US" sz="1250" dirty="0"/>
+          </a:p>
+        </p:txBody>
+      </p:sp>
+      <p:pic>
+        <p:nvPicPr>
+          <p:cNvPr id="11" name="Location" descr="/home/claude/restored/sip-repo/docs/screens/screen-06.png">    </p:cNvPr>
+          <p:cNvPicPr>
+            <a:picLocks noChangeAspect="1"/>
+          </p:cNvPicPr>
+          <p:nvPr/>
+        </p:nvPicPr>
+        <p:blipFill>
+          <a:blip r:embed="rId5"/>
+          <a:stretch>
+            <a:fillRect/>
+          </a:stretch>
+        </p:blipFill>
+        <p:spPr>
+          <a:xfrm>
+            <a:off x="9513557" y="1371600"/>
+            <a:ext cx="1903501" cy="3931920"/>
+          </a:xfrm>
+          <a:prstGeom prst="rect">
+            <a:avLst/>
+          </a:prstGeom>
+        </p:spPr>
+      </p:pic>
+      <p:sp>
+        <p:nvSpPr>
+          <p:cNvPr id="12" name="Text 5"/>
+          <p:cNvSpPr txBox="1"/>
+          <p:nvPr/>
+        </p:nvSpPr>
+        <p:spPr>
+          <a:xfrm>
+            <a:off x="9473184" y="5413248"/>
+            <a:ext cx="1984248" cy="914400"/>
+          </a:xfrm>
+          <a:prstGeom prst="rect">
+            <a:avLst/>
+          </a:prstGeom>
+          <a:noFill/>
+          <a:ln/>
+        </p:spPr>
+        <p:txBody>
+          <a:bodyPr wrap="square" lIns="0" tIns="0" rIns="0" bIns="0" rtlCol="0" anchor="t"/>
+          <a:lstStyle/>
+          <a:p>
+            <a:pPr algn="ctr" indent="0" marL="0">
+              <a:buNone/>
+            </a:pPr>
+            <a:r>
+              <a:rPr lang="en-US" sz="1250" b="1" dirty="0">
+                <a:solidFill>
+                  <a:srgbClr val="1F1D1A"/>
+                </a:solidFill>
+              </a:rPr>
+              <a:t>Location</a:t>
+            </a:r>
+            <a:endParaRPr lang="en-US" sz="1250" dirty="0"/>
+          </a:p>
+          <a:p>
+            <a:pPr algn="ctr" indent="0" marL="0">
+              <a:buNone/>
+            </a:pPr>
+            <a:r>
+              <a:rPr lang="en-US" sz="1050" dirty="0">
+                <a:solidFill>
+                  <a:srgbClr val="4A4438"/>
+                </a:solidFill>
+              </a:rPr>
+              <a:t>Hours and photo from Google Places; the menu is built from reviews.</a:t>
+            </a:r>
+            <a:endParaRPr lang="en-US" sz="1250" dirty="0"/>
           </a:p>
         </p:txBody>
       </p:sp>
@@ -5784,24 +7314,46 @@
                   <a:schemeClr val="tx1"/>
                 </a:solidFill>
               </a:rPr>
-              <a:t>Remaining work, risks, and the plan</a:t>
+              <a:t>The app: posting a review</a:t>
             </a:r>
             <a:endParaRPr lang="en-US" sz="3000" dirty="0"/>
           </a:p>
         </p:txBody>
       </p:sp>
-      <p:sp>
-        <p:nvSpPr>
-          <p:cNvPr id="3" name="Text 1"/>
-          <p:cNvSpPr/>
-          <p:nvPr>
-            <p:ph idx="102" type="body" hasCustomPrompt="1"/>
-          </p:nvPr>
-        </p:nvSpPr>
-        <p:spPr>
-          <a:xfrm>
-            <a:off x="731520" y="1417320"/>
-            <a:ext cx="10698480" cy="4754880"/>
+      <p:pic>
+        <p:nvPicPr>
+          <p:cNvPr id="3" name="Step 1" descr="/home/claude/restored/sip-repo/docs/screens/screen-15.png">    </p:cNvPr>
+          <p:cNvPicPr>
+            <a:picLocks noChangeAspect="1"/>
+          </p:cNvPicPr>
+          <p:nvPr/>
+        </p:nvPicPr>
+        <p:blipFill>
+          <a:blip r:embed="rId1"/>
+          <a:stretch>
+            <a:fillRect/>
+          </a:stretch>
+        </p:blipFill>
+        <p:spPr>
+          <a:xfrm>
+            <a:off x="1045070" y="1371600"/>
+            <a:ext cx="1903501" cy="3931920"/>
+          </a:xfrm>
+          <a:prstGeom prst="rect">
+            <a:avLst/>
+          </a:prstGeom>
+        </p:spPr>
+      </p:pic>
+      <p:sp>
+        <p:nvSpPr>
+          <p:cNvPr id="4" name="Text 1"/>
+          <p:cNvSpPr txBox="1"/>
+          <p:nvPr/>
+        </p:nvSpPr>
+        <p:spPr>
+          <a:xfrm>
+            <a:off x="731520" y="5413248"/>
+            <a:ext cx="2530602" cy="914400"/>
           </a:xfrm>
           <a:prstGeom prst="rect">
             <a:avLst/>
@@ -5810,137 +7362,257 @@
           <a:ln/>
         </p:spPr>
         <p:txBody>
-          <a:bodyPr wrap="square" rtlCol="0" anchor="t"/>
+          <a:bodyPr wrap="square" lIns="0" tIns="0" rIns="0" bIns="0" rtlCol="0" anchor="t"/>
           <a:lstStyle/>
           <a:p>
-            <a:pPr indent="0" marL="0">
-              <a:spcAft>
-                <a:spcPts val="400"/>
-              </a:spcAft>
-              <a:buNone/>
-            </a:pPr>
-            <a:r>
-              <a:rPr lang="en-US" sz="1700" b="1" dirty="0">
-                <a:solidFill>
-                  <a:srgbClr val="4A7C62"/>
-                </a:solidFill>
-              </a:rPr>
-              <a:t>To build</a:t>
-            </a:r>
-            <a:endParaRPr lang="en-US" sz="1700" dirty="0"/>
-          </a:p>
-          <a:p>
-            <a:pPr marL="342900" indent="-342900">
-              <a:spcAft>
-                <a:spcPts val="1000"/>
-              </a:spcAft>
-              <a:buSzPct val="100000"/>
-              <a:buChar char="•"/>
-            </a:pPr>
-            <a:r>
-              <a:rPr lang="en-US" sz="1700" dirty="0">
-                <a:solidFill>
-                  <a:schemeClr val="tx2"/>
-                </a:solidFill>
-              </a:rPr>
-              <a:t>Expo client replacing the demo page</a:t>
-            </a:r>
-            <a:endParaRPr lang="en-US" sz="1700" dirty="0"/>
-          </a:p>
-          <a:p>
-            <a:pPr marL="342900" indent="-342900">
-              <a:spcAft>
-                <a:spcPts val="1000"/>
-              </a:spcAft>
-              <a:buSzPct val="100000"/>
-              <a:buChar char="•"/>
-            </a:pPr>
-            <a:r>
-              <a:rPr lang="en-US" sz="1700" dirty="0">
-                <a:solidFill>
-                  <a:schemeClr val="tx2"/>
-                </a:solidFill>
-              </a:rPr>
-              <a:t>Menu import so drinks are not seeded by hand</a:t>
-            </a:r>
-            <a:endParaRPr lang="en-US" sz="1700" dirty="0"/>
-          </a:p>
-          <a:p>
-            <a:pPr marL="342900" indent="-342900">
-              <a:spcAft>
-                <a:spcPts val="1000"/>
-              </a:spcAft>
-              <a:buSzPct val="100000"/>
-              <a:buChar char="•"/>
-            </a:pPr>
-            <a:r>
-              <a:rPr lang="en-US" sz="1700" dirty="0">
-                <a:solidFill>
-                  <a:schemeClr val="tx2"/>
-                </a:solidFill>
-              </a:rPr>
-              <a:t>CloudFront in front of the photo bucket</a:t>
-            </a:r>
-            <a:endParaRPr lang="en-US" sz="1700" dirty="0"/>
-          </a:p>
-          <a:p>
-            <a:pPr indent="0" marL="0">
-              <a:buNone/>
-            </a:pPr>
-            <a:endParaRPr lang="en-US" sz="1700" dirty="0"/>
-          </a:p>
-          <a:p>
-            <a:pPr indent="0" marL="0">
-              <a:spcAft>
-                <a:spcPts val="400"/>
-              </a:spcAft>
-              <a:buNone/>
-            </a:pPr>
-            <a:r>
-              <a:rPr lang="en-US" sz="1700" b="1" dirty="0">
-                <a:solidFill>
-                  <a:srgbClr val="A8503C"/>
-                </a:solidFill>
-              </a:rPr>
-              <a:t>Risks</a:t>
-            </a:r>
-            <a:endParaRPr lang="en-US" sz="1700" dirty="0"/>
-          </a:p>
-          <a:p>
-            <a:pPr marL="342900" indent="-342900">
-              <a:spcAft>
-                <a:spcPts val="1000"/>
-              </a:spcAft>
-              <a:buSzPct val="100000"/>
-              <a:buChar char="•"/>
-            </a:pPr>
-            <a:r>
-              <a:rPr lang="en-US" sz="1700" dirty="0">
-                <a:solidFill>
-                  <a:schemeClr val="tx2"/>
-                </a:solidFill>
-              </a:rPr>
-              <a:t>Menu data entry is manual work, not a coding problem — mitigated by seeding a handful of shops rather than all of DFW</a:t>
-            </a:r>
-            <a:endParaRPr lang="en-US" sz="1700" dirty="0"/>
-          </a:p>
-          <a:p>
-            <a:pPr marL="342900" indent="-342900">
-              <a:spcAft>
-                <a:spcPts val="1000"/>
-              </a:spcAft>
-              <a:buSzPct val="100000"/>
-              <a:buChar char="•"/>
-            </a:pPr>
-            <a:r>
-              <a:rPr lang="en-US" sz="1700" dirty="0">
-                <a:solidFill>
-                  <a:schemeClr val="tx2"/>
-                </a:solidFill>
-              </a:rPr>
-              <a:t>Two-person team with overlapping deadlines; scope is deliberately narrow</a:t>
-            </a:r>
-            <a:endParaRPr lang="en-US" sz="1700" dirty="0"/>
+            <a:pPr algn="ctr" indent="0" marL="0">
+              <a:buNone/>
+            </a:pPr>
+            <a:r>
+              <a:rPr lang="en-US" sz="1250" b="1" dirty="0">
+                <a:solidFill>
+                  <a:srgbClr val="1F1D1A"/>
+                </a:solidFill>
+              </a:rPr>
+              <a:t>Step 1</a:t>
+            </a:r>
+            <a:endParaRPr lang="en-US" sz="1250" dirty="0"/>
+          </a:p>
+          <a:p>
+            <a:pPr algn="ctr" indent="0" marL="0">
+              <a:buNone/>
+            </a:pPr>
+            <a:r>
+              <a:rPr lang="en-US" sz="1050" dirty="0">
+                <a:solidFill>
+                  <a:srgbClr val="4A4438"/>
+                </a:solidFill>
+              </a:rPr>
+              <a:t>Location confirmed rather than silently taken. Photo required, EXIF stripped.</a:t>
+            </a:r>
+            <a:endParaRPr lang="en-US" sz="1250" dirty="0"/>
+          </a:p>
+        </p:txBody>
+      </p:sp>
+      <p:pic>
+        <p:nvPicPr>
+          <p:cNvPr id="5" name="Step 2" descr="/home/claude/restored/sip-repo/docs/screens/screen-16.png">    </p:cNvPr>
+          <p:cNvPicPr>
+            <a:picLocks noChangeAspect="1"/>
+          </p:cNvPicPr>
+          <p:nvPr/>
+        </p:nvPicPr>
+        <p:blipFill>
+          <a:blip r:embed="rId2"/>
+          <a:stretch>
+            <a:fillRect/>
+          </a:stretch>
+        </p:blipFill>
+        <p:spPr>
+          <a:xfrm>
+            <a:off x="3776840" y="1371600"/>
+            <a:ext cx="1903501" cy="3931920"/>
+          </a:xfrm>
+          <a:prstGeom prst="rect">
+            <a:avLst/>
+          </a:prstGeom>
+        </p:spPr>
+      </p:pic>
+      <p:sp>
+        <p:nvSpPr>
+          <p:cNvPr id="6" name="Text 2"/>
+          <p:cNvSpPr txBox="1"/>
+          <p:nvPr/>
+        </p:nvSpPr>
+        <p:spPr>
+          <a:xfrm>
+            <a:off x="3463290" y="5413248"/>
+            <a:ext cx="2530602" cy="914400"/>
+          </a:xfrm>
+          <a:prstGeom prst="rect">
+            <a:avLst/>
+          </a:prstGeom>
+          <a:noFill/>
+          <a:ln/>
+        </p:spPr>
+        <p:txBody>
+          <a:bodyPr wrap="square" lIns="0" tIns="0" rIns="0" bIns="0" rtlCol="0" anchor="t"/>
+          <a:lstStyle/>
+          <a:p>
+            <a:pPr algn="ctr" indent="0" marL="0">
+              <a:buNone/>
+            </a:pPr>
+            <a:r>
+              <a:rPr lang="en-US" sz="1250" b="1" dirty="0">
+                <a:solidFill>
+                  <a:srgbClr val="1F1D1A"/>
+                </a:solidFill>
+              </a:rPr>
+              <a:t>Step 2</a:t>
+            </a:r>
+            <a:endParaRPr lang="en-US" sz="1250" dirty="0"/>
+          </a:p>
+          <a:p>
+            <a:pPr algn="ctr" indent="0" marL="0">
+              <a:buNone/>
+            </a:pPr>
+            <a:r>
+              <a:rPr lang="en-US" sz="1050" dirty="0">
+                <a:solidFill>
+                  <a:srgbClr val="4A4438"/>
+                </a:solidFill>
+              </a:rPr>
+              <a:t>Rating, and whether the order was modified. Modified drinks score separately.</a:t>
+            </a:r>
+            <a:endParaRPr lang="en-US" sz="1250" dirty="0"/>
+          </a:p>
+        </p:txBody>
+      </p:sp>
+      <p:pic>
+        <p:nvPicPr>
+          <p:cNvPr id="7" name="Step 3" descr="/home/claude/restored/sip-repo/docs/screens/screen-17.png">    </p:cNvPr>
+          <p:cNvPicPr>
+            <a:picLocks noChangeAspect="1"/>
+          </p:cNvPicPr>
+          <p:nvPr/>
+        </p:nvPicPr>
+        <p:blipFill>
+          <a:blip r:embed="rId3"/>
+          <a:stretch>
+            <a:fillRect/>
+          </a:stretch>
+        </p:blipFill>
+        <p:spPr>
+          <a:xfrm>
+            <a:off x="6508610" y="1371600"/>
+            <a:ext cx="1903501" cy="3931920"/>
+          </a:xfrm>
+          <a:prstGeom prst="rect">
+            <a:avLst/>
+          </a:prstGeom>
+        </p:spPr>
+      </p:pic>
+      <p:sp>
+        <p:nvSpPr>
+          <p:cNvPr id="8" name="Text 3"/>
+          <p:cNvSpPr txBox="1"/>
+          <p:nvPr/>
+        </p:nvSpPr>
+        <p:spPr>
+          <a:xfrm>
+            <a:off x="6195060" y="5413248"/>
+            <a:ext cx="2530602" cy="914400"/>
+          </a:xfrm>
+          <a:prstGeom prst="rect">
+            <a:avLst/>
+          </a:prstGeom>
+          <a:noFill/>
+          <a:ln/>
+        </p:spPr>
+        <p:txBody>
+          <a:bodyPr wrap="square" lIns="0" tIns="0" rIns="0" bIns="0" rtlCol="0" anchor="t"/>
+          <a:lstStyle/>
+          <a:p>
+            <a:pPr algn="ctr" indent="0" marL="0">
+              <a:buNone/>
+            </a:pPr>
+            <a:r>
+              <a:rPr lang="en-US" sz="1250" b="1" dirty="0">
+                <a:solidFill>
+                  <a:srgbClr val="1F1D1A"/>
+                </a:solidFill>
+              </a:rPr>
+              <a:t>Step 3</a:t>
+            </a:r>
+            <a:endParaRPr lang="en-US" sz="1250" dirty="0"/>
+          </a:p>
+          <a:p>
+            <a:pPr algn="ctr" indent="0" marL="0">
+              <a:buNone/>
+            </a:pPr>
+            <a:r>
+              <a:rPr lang="en-US" sz="1050" dirty="0">
+                <a:solidFill>
+                  <a:srgbClr val="4A4438"/>
+                </a:solidFill>
+              </a:rPr>
+              <a:t>Optional note, then a summary before posting.</a:t>
+            </a:r>
+            <a:endParaRPr lang="en-US" sz="1250" dirty="0"/>
+          </a:p>
+        </p:txBody>
+      </p:sp>
+      <p:pic>
+        <p:nvPicPr>
+          <p:cNvPr id="9" name="Review again" descr="/home/claude/restored/sip-repo/docs/screens/screen-11.png">    </p:cNvPr>
+          <p:cNvPicPr>
+            <a:picLocks noChangeAspect="1"/>
+          </p:cNvPicPr>
+          <p:nvPr/>
+        </p:nvPicPr>
+        <p:blipFill>
+          <a:blip r:embed="rId4"/>
+          <a:stretch>
+            <a:fillRect/>
+          </a:stretch>
+        </p:blipFill>
+        <p:spPr>
+          <a:xfrm>
+            <a:off x="9240380" y="1371600"/>
+            <a:ext cx="1903501" cy="3931920"/>
+          </a:xfrm>
+          <a:prstGeom prst="rect">
+            <a:avLst/>
+          </a:prstGeom>
+        </p:spPr>
+      </p:pic>
+      <p:sp>
+        <p:nvSpPr>
+          <p:cNvPr id="10" name="Text 4"/>
+          <p:cNvSpPr txBox="1"/>
+          <p:nvPr/>
+        </p:nvSpPr>
+        <p:spPr>
+          <a:xfrm>
+            <a:off x="8926830" y="5413248"/>
+            <a:ext cx="2530602" cy="914400"/>
+          </a:xfrm>
+          <a:prstGeom prst="rect">
+            <a:avLst/>
+          </a:prstGeom>
+          <a:noFill/>
+          <a:ln/>
+        </p:spPr>
+        <p:txBody>
+          <a:bodyPr wrap="square" lIns="0" tIns="0" rIns="0" bIns="0" rtlCol="0" anchor="t"/>
+          <a:lstStyle/>
+          <a:p>
+            <a:pPr algn="ctr" indent="0" marL="0">
+              <a:buNone/>
+            </a:pPr>
+            <a:r>
+              <a:rPr lang="en-US" sz="1250" b="1" dirty="0">
+                <a:solidFill>
+                  <a:srgbClr val="1F1D1A"/>
+                </a:solidFill>
+              </a:rPr>
+              <a:t>Review again</a:t>
+            </a:r>
+            <a:endParaRPr lang="en-US" sz="1250" dirty="0"/>
+          </a:p>
+          <a:p>
+            <a:pPr algn="ctr" indent="0" marL="0">
+              <a:buNone/>
+            </a:pPr>
+            <a:r>
+              <a:rPr lang="en-US" sz="1050" dirty="0">
+                <a:solidFill>
+                  <a:srgbClr val="4A4438"/>
+                </a:solidFill>
+              </a:rPr>
+              <a:t>Posting the same drink twice updates the first review instead of duplicating.</a:t>
+            </a:r>
+            <a:endParaRPr lang="en-US" sz="1250" dirty="0"/>
           </a:p>
         </p:txBody>
       </p:sp>
